--- a/n2p-rs/fixtures/probe-pptx/sz_4x3.pptx
+++ b/n2p-rs/fixtures/probe-pptx/sz_4x3.pptx
@@ -5,10 +5,13 @@
   <p:sldMasterIdLst>
     <p:sldMasterId r:id="rId1" id="2147483648"/>
   </p:sldMasterIdLst>
+  <p:sldIdLst>
+    <p:sldId r:id="rId7" id="257"/>
+  </p:sldIdLst>
   <p:sldSz cx="9144000" cy="6858000" type="screen4x3"/>
   <p:notesSz cx="6858000" cy="9144000"/>
   <p:custDataLst>
-    <p:tags r:id="rId7"/>
+    <p:tags r:id="rId8"/>
   </p:custDataLst>
   <p:defaultTextStyle>
     <a:defPPr>
@@ -3105,6 +3108,39 @@
 </p:sldMaster>
 </file>
 
+<file path=ppt/slides/slide1.xml><?xml version="1.0" encoding="utf-8"?>
+<p:sld xmlns:a="http://schemas.openxmlformats.org/drawingml/2006/main" xmlns:r="http://schemas.openxmlformats.org/officeDocument/2006/relationships" xmlns:p="http://schemas.openxmlformats.org/presentationml/2006/main">
+  <p:cSld name="">
+    <p:spTree>
+      <p:nvGrpSpPr>
+        <p:cNvPr id="1" name=""/>
+        <p:cNvGrpSpPr/>
+        <p:nvPr/>
+      </p:nvGrpSpPr>
+      <p:grpSpPr>
+        <a:xfrm>
+          <a:off x="0" y="0"/>
+          <a:ext cx="0" cy="0"/>
+          <a:chOff x="0" y="0"/>
+          <a:chExt cx="0" cy="0"/>
+        </a:xfrm>
+      </p:grpSpPr>
+    </p:spTree>
+  </p:cSld>
+  <p:clrMapOvr>
+    <a:masterClrMapping/>
+  </p:clrMapOvr>
+  <p:transition spd="fast"/>
+  <p:timing>
+    <p:tnLst>
+      <p:par>
+        <p:cTn id="1" restart="never" nodeType="tmRoot"/>
+      </p:par>
+    </p:tnLst>
+  </p:timing>
+</p:sld>
+</file>
+
 <file path=ppt/tags/tag1.xml><?xml version="1.0" encoding="utf-8"?>
 <p:tagLst xmlns:p="http://schemas.openxmlformats.org/presentationml/2006/main">
   <p:tag name="AS_NET" val="9.0.4"/>
@@ -3161,71 +3197,71 @@
         <a:latin typeface="Calibri"/>
         <a:ea typeface=""/>
         <a:cs typeface=""/>
+        <a:font script="Hebr" typeface="Times New Roman"/>
+        <a:font script="Taml" typeface="Latha"/>
+        <a:font script="Hang" typeface="맑은 고딕"/>
+        <a:font script="Geor" typeface="Sylfaen"/>
+        <a:font script="Jpan" typeface="ＭＳ Ｐゴシック"/>
+        <a:font script="Laoo" typeface="DokChampa"/>
+        <a:font script="Mlym" typeface="Kartika"/>
+        <a:font script="Mong" typeface="Mongolian Baiti"/>
+        <a:font script="Tibt" typeface="Microsoft Himalaya"/>
+        <a:font script="Viet" typeface="Times New Roman"/>
+        <a:font script="Syrc" typeface="Estrangelo Edessa"/>
+        <a:font script="Cans" typeface="Euphemia"/>
+        <a:font script="Knda" typeface="Tunga"/>
+        <a:font script="Yiii" typeface="Microsoft Yi Baiti"/>
+        <a:font script="Beng" typeface="Vrinda"/>
+        <a:font script="Uigh" typeface="Microsoft Uighur"/>
+        <a:font script="Deva" typeface="Mangal"/>
+        <a:font script="Sinh" typeface="Iskoola Pota"/>
+        <a:font script="Orya" typeface="Kalinga"/>
+        <a:font script="Khmr" typeface="MoolBoran"/>
+        <a:font script="Thaa" typeface="MV Boli"/>
+        <a:font script="Gujr" typeface="Shruti"/>
+        <a:font script="Telu" typeface="Gautami"/>
+        <a:font script="Guru" typeface="Raavi"/>
+        <a:font script="Cher" typeface="Plantagenet Cherokee"/>
+        <a:font script="Arab" typeface="Times New Roman"/>
         <a:font script="Ethi" typeface="Nyala"/>
-        <a:font script="Viet" typeface="Times New Roman"/>
-        <a:font script="Gujr" typeface="Shruti"/>
-        <a:font script="Taml" typeface="Latha"/>
-        <a:font script="Uigh" typeface="Microsoft Uighur"/>
-        <a:font script="Mong" typeface="Mongolian Baiti"/>
-        <a:font script="Hang" typeface="맑은 고딕"/>
+        <a:font script="Thai" typeface="Angsana New"/>
         <a:font script="Hans" typeface="宋体"/>
-        <a:font script="Thai" typeface="Angsana New"/>
-        <a:font script="Mlym" typeface="Kartika"/>
-        <a:font script="Laoo" typeface="DokChampa"/>
-        <a:font script="Hebr" typeface="Times New Roman"/>
-        <a:font script="Sinh" typeface="Iskoola Pota"/>
-        <a:font script="Syrc" typeface="Estrangelo Edessa"/>
-        <a:font script="Yiii" typeface="Microsoft Yi Baiti"/>
-        <a:font script="Thaa" typeface="MV Boli"/>
-        <a:font script="Guru" typeface="Raavi"/>
-        <a:font script="Orya" typeface="Kalinga"/>
-        <a:font script="Geor" typeface="Sylfaen"/>
-        <a:font script="Knda" typeface="Tunga"/>
-        <a:font script="Arab" typeface="Times New Roman"/>
-        <a:font script="Jpan" typeface="ＭＳ Ｐゴシック"/>
-        <a:font script="Deva" typeface="Mangal"/>
-        <a:font script="Beng" typeface="Vrinda"/>
-        <a:font script="Cher" typeface="Plantagenet Cherokee"/>
-        <a:font script="Khmr" typeface="MoolBoran"/>
         <a:font script="Hant" typeface="新細明體"/>
-        <a:font script="Tibt" typeface="Microsoft Himalaya"/>
-        <a:font script="Cans" typeface="Euphemia"/>
-        <a:font script="Telu" typeface="Gautami"/>
       </a:majorFont>
       <a:minorFont>
         <a:latin typeface="Calibri"/>
         <a:ea typeface=""/>
         <a:cs typeface=""/>
+        <a:font script="Hebr" typeface="Arial"/>
+        <a:font script="Taml" typeface="Latha"/>
+        <a:font script="Hang" typeface="맑은 고딕"/>
+        <a:font script="Geor" typeface="Sylfaen"/>
+        <a:font script="Jpan" typeface="ＭＳ Ｐゴシック"/>
+        <a:font script="Laoo" typeface="DokChampa"/>
+        <a:font script="Mlym" typeface="Kartika"/>
+        <a:font script="Mong" typeface="Mongolian Baiti"/>
+        <a:font script="Tibt" typeface="Microsoft Himalaya"/>
+        <a:font script="Viet" typeface="Arial"/>
+        <a:font script="Syrc" typeface="Estrangelo Edessa"/>
+        <a:font script="Cans" typeface="Euphemia"/>
+        <a:font script="Knda" typeface="Tunga"/>
+        <a:font script="Yiii" typeface="Microsoft Yi Baiti"/>
+        <a:font script="Beng" typeface="Vrinda"/>
+        <a:font script="Uigh" typeface="Microsoft Uighur"/>
+        <a:font script="Deva" typeface="Mangal"/>
+        <a:font script="Sinh" typeface="Iskoola Pota"/>
+        <a:font script="Orya" typeface="Kalinga"/>
+        <a:font script="Khmr" typeface="DaunPenh"/>
+        <a:font script="Thaa" typeface="MV Boli"/>
+        <a:font script="Gujr" typeface="Shruti"/>
+        <a:font script="Telu" typeface="Gautami"/>
+        <a:font script="Guru" typeface="Raavi"/>
+        <a:font script="Cher" typeface="Plantagenet Cherokee"/>
+        <a:font script="Arab" typeface="Arial"/>
         <a:font script="Ethi" typeface="Nyala"/>
-        <a:font script="Viet" typeface="Arial"/>
-        <a:font script="Gujr" typeface="Shruti"/>
-        <a:font script="Taml" typeface="Latha"/>
-        <a:font script="Uigh" typeface="Microsoft Uighur"/>
-        <a:font script="Mong" typeface="Mongolian Baiti"/>
-        <a:font script="Hang" typeface="맑은 고딕"/>
+        <a:font script="Thai" typeface="Cordia New"/>
         <a:font script="Hans" typeface="宋体"/>
-        <a:font script="Thai" typeface="Cordia New"/>
-        <a:font script="Mlym" typeface="Kartika"/>
-        <a:font script="Laoo" typeface="DokChampa"/>
-        <a:font script="Hebr" typeface="Arial"/>
-        <a:font script="Sinh" typeface="Iskoola Pota"/>
-        <a:font script="Syrc" typeface="Estrangelo Edessa"/>
-        <a:font script="Yiii" typeface="Microsoft Yi Baiti"/>
-        <a:font script="Thaa" typeface="MV Boli"/>
-        <a:font script="Guru" typeface="Raavi"/>
-        <a:font script="Orya" typeface="Kalinga"/>
-        <a:font script="Geor" typeface="Sylfaen"/>
-        <a:font script="Knda" typeface="Tunga"/>
-        <a:font script="Arab" typeface="Arial"/>
-        <a:font script="Jpan" typeface="ＭＳ Ｐゴシック"/>
-        <a:font script="Deva" typeface="Mangal"/>
-        <a:font script="Beng" typeface="Vrinda"/>
-        <a:font script="Cher" typeface="Plantagenet Cherokee"/>
-        <a:font script="Khmr" typeface="DaunPenh"/>
         <a:font script="Hant" typeface="新細明體"/>
-        <a:font script="Tibt" typeface="Microsoft Himalaya"/>
-        <a:font script="Cans" typeface="Euphemia"/>
-        <a:font script="Telu" typeface="Gautami"/>
       </a:minorFont>
     </a:fontScheme>
     <a:fmtScheme name="Office">
